--- a/19-slide-deck.pptx
+++ b/19-slide-deck.pptx
@@ -666,7 +666,7 @@
           <a:lstStyle/>
           <a:p>
             <a:r>
-              <a:t>This gap is the point, not a mistake to reconcile — "generate your own power" vs. "buy from the grid."</a:t>
+              <a:t>This gap is the point, not a mistake to reconcile — "generate your own power" vs. "buy from the grid." The size of the gap is tier- and utilization-dependent, not a fixed multiple.</a:t>
             </a:r>
           </a:p>
         </p:txBody>
@@ -5730,7 +5730,7 @@
               </a:defRPr>
             </a:pPr>
             <a:r>
-              <a:t>•  Owned production: Home ~$0.6-2/M tokens; Hyperscale ~$0.091-0.312/M tokens, canonical full-layer, mid $0.133/M [CALC] — 1-2 orders of magnitude below retail, by design, not error</a:t>
+              <a:t>•  Owned production: Home $1.37-$11.89/M tokens (canonical); Hyperscale ~$0.091-0.312/M tokens, canonical full-layer, mid $0.133/M [CALC] — Hyperscale sits 1-2 orders of magnitude below retail; Home sits closer to, and at low utilization inside, the cheapest retail floor</a:t>
             </a:r>
           </a:p>
         </p:txBody>
@@ -7418,7 +7418,7 @@
                         <a:defRPr sz="1300"/>
                       </a:pPr>
                       <a:r>
-                        <a:t>1-2 orders of magnitude below retail</a:t>
+                        <a:t>Up to 1-2 orders of magnitude below retail at hyperscale; narrower at home/cooperative scale</a:t>
                       </a:r>
                     </a:p>
                   </a:txBody>

--- a/19-slide-deck.pptx
+++ b/19-slide-deck.pptx
@@ -10626,7 +10626,7 @@
               </a:defRPr>
             </a:pPr>
             <a:r>
-              <a:t>Bubble, Infrastructure Transition, or Both?</a:t>
+              <a:t>What Would Need to Be True: Bubble, Infrastructure Transition, or Both?</a:t>
             </a:r>
           </a:p>
         </p:txBody>

--- a/19-slide-deck.pptx
+++ b/19-slide-deck.pptx
@@ -6496,7 +6496,7 @@
               </a:defRPr>
             </a:pPr>
             <a:r>
-              <a:t>•  Author's own framing: information is "the operating system for AI" [FACT that phrase appears; INTERP as underlying claim] — disclosed author interest in this framing (Prifina/Digiole/peecos)</a:t>
+              <a:t>•  Author's own framing: information is "the operating system for AI" [FACT that phrase appears; INTERP as underlying claim] — disclosed author interest in this framing (Prifina/Digiole/ValtoAI/PIOS/EIOS)</a:t>
             </a:r>
           </a:p>
           <a:p>

--- a/19-slide-deck.pptx
+++ b/19-slide-deck.pptx
@@ -30,6 +30,7 @@
     <p:sldId id="278" r:id="rId30"/>
     <p:sldId id="279" r:id="rId31"/>
     <p:sldId id="280" r:id="rId32"/>
+    <p:sldId id="281" r:id="rId33"/>
   </p:sldIdLst>
   <p:sldSz cx="12191695" cy="6858000" type="screen4x3"/>
   <p:notesSz cx="6858000" cy="9144000"/>
@@ -1156,7 +1157,7 @@
           <a:lstStyle/>
           <a:p>
             <a:r>
-              <a:t>Use this to reframe "who owns AI" as a bad question — it's really six or seven different questions.</a:t>
+              <a:t>This slide is the second hinge — it stops the room from reading "cheaper tokens" as "more growth" without the missing middle step.</a:t>
             </a:r>
           </a:p>
         </p:txBody>
@@ -1226,7 +1227,7 @@
           <a:lstStyle/>
           <a:p>
             <a:r>
-              <a:t>The two cooperative figures describe two different hardware tiers (a DGX Spark pool vs. a shared workstation-class machine), not a discrepancy in one estimate.</a:t>
+              <a:t>Use this to reframe "who owns AI" as a bad question — it's really six or seven different questions.</a:t>
             </a:r>
           </a:p>
         </p:txBody>
@@ -1366,7 +1367,7 @@
           <a:lstStyle/>
           <a:p>
             <a:r>
-              <a:t>Note explicitly that this analogy is the author's own structural comparison, flagged as such rather than presented as settled.</a:t>
+              <a:t>The two cooperative figures describe two different hardware tiers (a DGX Spark pool vs. a shared workstation-class machine), not a discrepancy in one estimate.</a:t>
             </a:r>
           </a:p>
         </p:txBody>
@@ -1436,7 +1437,7 @@
           <a:lstStyle/>
           <a:p>
             <a:r>
-              <a:t>State the non-advice boundary explicitly here — every number is a scenario, not a recommendation.</a:t>
+              <a:t>Note explicitly that this analogy is the author's own structural comparison, flagged as such rather than presented as settled.</a:t>
             </a:r>
           </a:p>
         </p:txBody>
@@ -1506,7 +1507,7 @@
           <a:lstStyle/>
           <a:p>
             <a:r>
-              <a:t>Flag this as a "later, illustrative extension," not a general robotics-economics claim.</a:t>
+              <a:t>State the non-advice boundary explicitly here — every number is a scenario, not a recommendation.</a:t>
             </a:r>
           </a:p>
         </p:txBody>
@@ -1576,7 +1577,7 @@
           <a:lstStyle/>
           <a:p>
             <a:r>
-              <a:t>Reiterate — these are grouped for slide economy only, not because any lens outranks another.</a:t>
+              <a:t>Flag this as a "later, illustrative extension," not a general robotics-economics claim.</a:t>
             </a:r>
           </a:p>
         </p:txBody>
@@ -1646,7 +1647,7 @@
           <a:lstStyle/>
           <a:p>
             <a:r>
-              <a:t>End on the open question, not a resolved answer — the paper deliberately does not decide this for the reader.</a:t>
+              <a:t>Reiterate — these are grouped for slide economy only, not because any lens outranks another.</a:t>
             </a:r>
           </a:p>
         </p:txBody>
@@ -1672,6 +1673,76 @@
 </file>
 
 <file path=ppt/notesSlides/notesSlide25.xml><?xml version="1.0" encoding="utf-8"?>
+<p:notes xmlns:a="http://schemas.openxmlformats.org/drawingml/2006/main" xmlns:p="http://schemas.openxmlformats.org/presentationml/2006/main" xmlns:r="http://schemas.openxmlformats.org/officeDocument/2006/relationships">
+  <p:cSld>
+    <p:spTree>
+      <p:nvGrpSpPr>
+        <p:cNvPr id="1" name=""/>
+        <p:cNvGrpSpPr/>
+        <p:nvPr/>
+      </p:nvGrpSpPr>
+      <p:grpSpPr>
+        <a:xfrm>
+          <a:off x="0" y="0"/>
+          <a:ext cx="0" cy="0"/>
+          <a:chOff x="0" y="0"/>
+          <a:chExt cx="0" cy="0"/>
+        </a:xfrm>
+      </p:grpSpPr>
+      <p:sp>
+        <p:nvSpPr>
+          <p:cNvPr id="2" name="Slide Image Placeholder 1"/>
+          <p:cNvSpPr>
+            <a:spLocks noGrp="1"/>
+          </p:cNvSpPr>
+          <p:nvPr>
+            <p:ph type="sldImg" idx="2"/>
+          </p:nvPr>
+        </p:nvSpPr>
+        <p:spPr/>
+      </p:sp>
+      <p:sp>
+        <p:nvSpPr>
+          <p:cNvPr id="3" name="Notes Placeholder 2"/>
+          <p:cNvSpPr>
+            <a:spLocks noGrp="1"/>
+          </p:cNvSpPr>
+          <p:nvPr>
+            <p:ph type="body" idx="3" sz="quarter"/>
+          </p:nvPr>
+        </p:nvSpPr>
+        <p:spPr/>
+        <p:txBody>
+          <a:bodyPr/>
+          <a:lstStyle/>
+          <a:p>
+            <a:r>
+              <a:t>End on the open question, not a resolved answer — the paper deliberately does not decide this for the reader.</a:t>
+            </a:r>
+          </a:p>
+        </p:txBody>
+      </p:sp>
+      <p:sp>
+        <p:nvSpPr>
+          <p:cNvPr id="4" name="Slide Number Placeholder 3"/>
+          <p:cNvSpPr>
+            <a:spLocks noGrp="1"/>
+          </p:cNvSpPr>
+          <p:nvPr>
+            <p:ph type="sldNum" idx="5" sz="quarter"/>
+          </p:nvPr>
+        </p:nvSpPr>
+        <p:spPr/>
+      </p:sp>
+    </p:spTree>
+  </p:cSld>
+  <p:clrMapOvr>
+    <a:masterClrMapping/>
+  </p:clrMapOvr>
+</p:notes>
+</file>
+
+<file path=ppt/notesSlides/notesSlide26.xml><?xml version="1.0" encoding="utf-8"?>
 <p:notes xmlns:a="http://schemas.openxmlformats.org/drawingml/2006/main" xmlns:p="http://schemas.openxmlformats.org/presentationml/2006/main" xmlns:r="http://schemas.openxmlformats.org/officeDocument/2006/relationships">
   <p:cSld>
     <p:spTree>
@@ -7048,28 +7119,52 @@
           <a:lstStyle/>
           <a:p>
             <a:pPr>
-              <a:defRPr sz="3200" b="1">
+              <a:defRPr sz="2800" b="1">
                 <a:solidFill>
                   <a:srgbClr val="0D1B2A"/>
                 </a:solidFill>
               </a:defRPr>
             </a:pPr>
             <a:r>
-              <a:t>Part V: The Ownership Stack</a:t>
-            </a:r>
-          </a:p>
-        </p:txBody>
-      </p:sp>
-      <p:sp>
-        <p:nvSpPr>
-          <p:cNvPr id="4" name="TextBox 3"/>
+              <a:t>From AI Working Capacity to New Value</a:t>
+            </a:r>
+          </a:p>
+        </p:txBody>
+      </p:sp>
+      <p:pic>
+        <p:nvPicPr>
+          <p:cNvPr id="4" name="Picture 3" descr="diagram-11-creating-growth-from-new-value.png"/>
+          <p:cNvPicPr>
+            <a:picLocks noChangeAspect="1"/>
+          </p:cNvPicPr>
+          <p:nvPr/>
+        </p:nvPicPr>
+        <p:blipFill>
+          <a:blip r:embed="rId2"/>
+          <a:stretch>
+            <a:fillRect/>
+          </a:stretch>
+        </p:blipFill>
+        <p:spPr>
+          <a:xfrm>
+            <a:off x="3033283" y="1234440"/>
+            <a:ext cx="6094953" cy="4297680"/>
+          </a:xfrm>
+          <a:prstGeom prst="rect">
+            <a:avLst/>
+          </a:prstGeom>
+        </p:spPr>
+      </p:pic>
+      <p:sp>
+        <p:nvSpPr>
+          <p:cNvPr id="5" name="TextBox 4"/>
           <p:cNvSpPr txBox="1"/>
           <p:nvPr/>
         </p:nvSpPr>
         <p:spPr>
           <a:xfrm>
-            <a:off x="640080" y="1371600"/>
-            <a:ext cx="10881360" cy="4389120"/>
+            <a:off x="640080" y="5532120"/>
+            <a:ext cx="10881360" cy="914400"/>
           </a:xfrm>
           <a:prstGeom prst="rect">
             <a:avLst/>
@@ -7086,14 +7181,14 @@
               <a:spcAft>
                 <a:spcPts val="1000"/>
               </a:spcAft>
-              <a:defRPr sz="1800">
+              <a:defRPr sz="1300">
                 <a:solidFill>
                   <a:srgbClr val="222222"/>
                 </a:solidFill>
               </a:defRPr>
             </a:pPr>
             <a:r>
-              <a:t>•  Layers, each separately ownable: energy, hardware, compute (access), models, information, agents, identity, governance</a:t>
+              <a:t>•  [INTERP] Conceptual bridge, not a numerical finding: capacity created (Parts I-IV) is not automatically growth, income, or social benefit</a:t>
             </a:r>
           </a:p>
           <a:p>
@@ -7101,14 +7196,14 @@
               <a:spcAft>
                 <a:spcPts val="1000"/>
               </a:spcAft>
-              <a:defRPr sz="1800">
+              <a:defRPr sz="1300">
                 <a:solidFill>
                   <a:srgbClr val="222222"/>
                 </a:solidFill>
               </a:defRPr>
             </a:pPr>
             <a:r>
-              <a:t>•  Concentration varies sharply by layer: hardware manufacturing is extremely concentrated [FACT/INTERP]; information is the least standardized/portable layer [INTERP]</a:t>
+              <a:t>•  Two separate questions: can the capacity be created (cost/utilization model) vs. can it create and capture new value (invention, adoption, revenue model)</a:t>
             </a:r>
           </a:p>
           <a:p>
@@ -7116,21 +7211,21 @@
               <a:spcAft>
                 <a:spcPts val="1000"/>
               </a:spcAft>
-              <a:defRPr sz="1800">
+              <a:defRPr sz="1300">
                 <a:solidFill>
                   <a:srgbClr val="222222"/>
                 </a:solidFill>
               </a:defRPr>
             </a:pPr>
             <a:r>
-              <a:t>•  No single actor owns "AI" end to end — ownership questions must be asked layer by layer</a:t>
-            </a:r>
-          </a:p>
-        </p:txBody>
-      </p:sp>
-      <p:sp>
-        <p:nvSpPr>
-          <p:cNvPr id="5" name="TextBox 4"/>
+              <a:t>•  Same boundary applies to any future Scenario Explorer built on this paper's workbooks — it models cost and capacity, not value creation</a:t>
+            </a:r>
+          </a:p>
+        </p:txBody>
+      </p:sp>
+      <p:sp>
+        <p:nvSpPr>
+          <p:cNvPr id="6" name="TextBox 5"/>
           <p:cNvSpPr txBox="1"/>
           <p:nvPr/>
         </p:nvSpPr>
@@ -7172,6 +7267,623 @@
 </file>
 
 <file path=ppt/slides/slide19.xml><?xml version="1.0" encoding="utf-8"?>
+<p:sld xmlns:a="http://schemas.openxmlformats.org/drawingml/2006/main" xmlns:p="http://schemas.openxmlformats.org/presentationml/2006/main" xmlns:r="http://schemas.openxmlformats.org/officeDocument/2006/relationships">
+  <p:cSld>
+    <p:spTree>
+      <p:nvGrpSpPr>
+        <p:cNvPr id="1" name=""/>
+        <p:cNvGrpSpPr/>
+        <p:nvPr/>
+      </p:nvGrpSpPr>
+      <p:grpSpPr/>
+      <p:sp>
+        <p:nvSpPr>
+          <p:cNvPr id="2" name="Rectangle 1"/>
+          <p:cNvSpPr/>
+          <p:nvPr/>
+        </p:nvSpPr>
+        <p:spPr>
+          <a:xfrm>
+            <a:off x="0" y="0"/>
+            <a:ext cx="164592" cy="6858000"/>
+          </a:xfrm>
+          <a:prstGeom prst="rect">
+            <a:avLst/>
+          </a:prstGeom>
+          <a:solidFill>
+            <a:srgbClr val="1B4965"/>
+          </a:solidFill>
+          <a:ln>
+            <a:noFill/>
+          </a:ln>
+        </p:spPr>
+        <p:style>
+          <a:lnRef idx="1">
+            <a:schemeClr val="accent1"/>
+          </a:lnRef>
+          <a:fillRef idx="3">
+            <a:schemeClr val="accent1"/>
+          </a:fillRef>
+          <a:effectRef idx="2">
+            <a:schemeClr val="accent1"/>
+          </a:effectRef>
+          <a:fontRef idx="minor">
+            <a:schemeClr val="lt1"/>
+          </a:fontRef>
+        </p:style>
+        <p:txBody>
+          <a:bodyPr rtlCol="0" anchor="ctr"/>
+          <a:lstStyle/>
+          <a:p>
+            <a:pPr algn="ctr"/>
+          </a:p>
+        </p:txBody>
+      </p:sp>
+      <p:sp>
+        <p:nvSpPr>
+          <p:cNvPr id="3" name="TextBox 2"/>
+          <p:cNvSpPr txBox="1"/>
+          <p:nvPr/>
+        </p:nvSpPr>
+        <p:spPr>
+          <a:xfrm>
+            <a:off x="548640" y="320040"/>
+            <a:ext cx="11155680" cy="914400"/>
+          </a:xfrm>
+          <a:prstGeom prst="rect">
+            <a:avLst/>
+          </a:prstGeom>
+          <a:noFill/>
+        </p:spPr>
+        <p:txBody>
+          <a:bodyPr wrap="square">
+            <a:spAutoFit/>
+          </a:bodyPr>
+          <a:lstStyle/>
+          <a:p>
+            <a:pPr>
+              <a:defRPr sz="3200" b="1">
+                <a:solidFill>
+                  <a:srgbClr val="0D1B2A"/>
+                </a:solidFill>
+              </a:defRPr>
+            </a:pPr>
+            <a:r>
+              <a:t>Part V: The Ownership Stack</a:t>
+            </a:r>
+          </a:p>
+        </p:txBody>
+      </p:sp>
+      <p:sp>
+        <p:nvSpPr>
+          <p:cNvPr id="4" name="TextBox 3"/>
+          <p:cNvSpPr txBox="1"/>
+          <p:nvPr/>
+        </p:nvSpPr>
+        <p:spPr>
+          <a:xfrm>
+            <a:off x="640080" y="1371600"/>
+            <a:ext cx="10881360" cy="4389120"/>
+          </a:xfrm>
+          <a:prstGeom prst="rect">
+            <a:avLst/>
+          </a:prstGeom>
+          <a:noFill/>
+        </p:spPr>
+        <p:txBody>
+          <a:bodyPr wrap="square">
+            <a:spAutoFit/>
+          </a:bodyPr>
+          <a:lstStyle/>
+          <a:p>
+            <a:pPr>
+              <a:spcAft>
+                <a:spcPts val="1000"/>
+              </a:spcAft>
+              <a:defRPr sz="1800">
+                <a:solidFill>
+                  <a:srgbClr val="222222"/>
+                </a:solidFill>
+              </a:defRPr>
+            </a:pPr>
+            <a:r>
+              <a:t>•  Layers, each separately ownable: energy, hardware, compute (access), models, information, agents, identity, governance</a:t>
+            </a:r>
+          </a:p>
+          <a:p>
+            <a:pPr>
+              <a:spcAft>
+                <a:spcPts val="1000"/>
+              </a:spcAft>
+              <a:defRPr sz="1800">
+                <a:solidFill>
+                  <a:srgbClr val="222222"/>
+                </a:solidFill>
+              </a:defRPr>
+            </a:pPr>
+            <a:r>
+              <a:t>•  Concentration varies sharply by layer: hardware manufacturing is extremely concentrated [FACT/INTERP]; information is the least standardized/portable layer [INTERP]</a:t>
+            </a:r>
+          </a:p>
+          <a:p>
+            <a:pPr>
+              <a:spcAft>
+                <a:spcPts val="1000"/>
+              </a:spcAft>
+              <a:defRPr sz="1800">
+                <a:solidFill>
+                  <a:srgbClr val="222222"/>
+                </a:solidFill>
+              </a:defRPr>
+            </a:pPr>
+            <a:r>
+              <a:t>•  No single actor owns "AI" end to end — ownership questions must be asked layer by layer</a:t>
+            </a:r>
+          </a:p>
+        </p:txBody>
+      </p:sp>
+      <p:sp>
+        <p:nvSpPr>
+          <p:cNvPr id="5" name="TextBox 4"/>
+          <p:cNvSpPr txBox="1"/>
+          <p:nvPr/>
+        </p:nvSpPr>
+        <p:spPr>
+          <a:xfrm>
+            <a:off x="548640" y="6446520"/>
+            <a:ext cx="10972800" cy="320040"/>
+          </a:xfrm>
+          <a:prstGeom prst="rect">
+            <a:avLst/>
+          </a:prstGeom>
+          <a:noFill/>
+        </p:spPr>
+        <p:txBody>
+          <a:bodyPr wrap="none">
+            <a:spAutoFit/>
+          </a:bodyPr>
+          <a:lstStyle/>
+          <a:p>
+            <a:pPr>
+              <a:defRPr sz="1000" i="1">
+                <a:solidFill>
+                  <a:srgbClr val="444444"/>
+                </a:solidFill>
+              </a:defRPr>
+            </a:pPr>
+            <a:r>
+              <a:t>CC BY 4.0 — Valto Loikkanen — factual source cut-off 2026-08-13</a:t>
+            </a:r>
+          </a:p>
+        </p:txBody>
+      </p:sp>
+    </p:spTree>
+  </p:cSld>
+  <p:clrMapOvr>
+    <a:masterClrMapping/>
+  </p:clrMapOvr>
+</p:sld>
+</file>
+
+<file path=ppt/slides/slide2.xml><?xml version="1.0" encoding="utf-8"?>
+<p:sld xmlns:a="http://schemas.openxmlformats.org/drawingml/2006/main" xmlns:p="http://schemas.openxmlformats.org/presentationml/2006/main" xmlns:r="http://schemas.openxmlformats.org/officeDocument/2006/relationships">
+  <p:cSld>
+    <p:spTree>
+      <p:nvGrpSpPr>
+        <p:cNvPr id="1" name=""/>
+        <p:cNvGrpSpPr/>
+        <p:nvPr/>
+      </p:nvGrpSpPr>
+      <p:grpSpPr/>
+      <p:sp>
+        <p:nvSpPr>
+          <p:cNvPr id="2" name="Rectangle 1"/>
+          <p:cNvSpPr/>
+          <p:nvPr/>
+        </p:nvSpPr>
+        <p:spPr>
+          <a:xfrm>
+            <a:off x="0" y="0"/>
+            <a:ext cx="164592" cy="6858000"/>
+          </a:xfrm>
+          <a:prstGeom prst="rect">
+            <a:avLst/>
+          </a:prstGeom>
+          <a:solidFill>
+            <a:srgbClr val="1B4965"/>
+          </a:solidFill>
+          <a:ln>
+            <a:noFill/>
+          </a:ln>
+        </p:spPr>
+        <p:style>
+          <a:lnRef idx="1">
+            <a:schemeClr val="accent1"/>
+          </a:lnRef>
+          <a:fillRef idx="3">
+            <a:schemeClr val="accent1"/>
+          </a:fillRef>
+          <a:effectRef idx="2">
+            <a:schemeClr val="accent1"/>
+          </a:effectRef>
+          <a:fontRef idx="minor">
+            <a:schemeClr val="lt1"/>
+          </a:fontRef>
+        </p:style>
+        <p:txBody>
+          <a:bodyPr rtlCol="0" anchor="ctr"/>
+          <a:lstStyle/>
+          <a:p>
+            <a:pPr algn="ctr"/>
+          </a:p>
+        </p:txBody>
+      </p:sp>
+      <p:sp>
+        <p:nvSpPr>
+          <p:cNvPr id="3" name="TextBox 2"/>
+          <p:cNvSpPr txBox="1"/>
+          <p:nvPr/>
+        </p:nvSpPr>
+        <p:spPr>
+          <a:xfrm>
+            <a:off x="548640" y="320040"/>
+            <a:ext cx="11155680" cy="914400"/>
+          </a:xfrm>
+          <a:prstGeom prst="rect">
+            <a:avLst/>
+          </a:prstGeom>
+          <a:noFill/>
+        </p:spPr>
+        <p:txBody>
+          <a:bodyPr wrap="square">
+            <a:spAutoFit/>
+          </a:bodyPr>
+          <a:lstStyle/>
+          <a:p>
+            <a:pPr>
+              <a:defRPr sz="3200" b="1">
+                <a:solidFill>
+                  <a:srgbClr val="0D1B2A"/>
+                </a:solidFill>
+              </a:defRPr>
+            </a:pPr>
+            <a:r>
+              <a:t>Method: Five Evidence Classes</a:t>
+            </a:r>
+          </a:p>
+        </p:txBody>
+      </p:sp>
+      <p:graphicFrame>
+        <p:nvGraphicFramePr>
+          <p:cNvPr id="4" name="Table 3"/>
+          <p:cNvGraphicFramePr>
+            <a:graphicFrameLocks noGrp="1"/>
+          </p:cNvGraphicFramePr>
+          <p:nvPr/>
+        </p:nvGraphicFramePr>
+        <p:xfrm>
+          <a:off x="640080" y="1463040"/>
+          <a:ext cx="10881360" cy="2743200"/>
+        </p:xfrm>
+        <a:graphic>
+          <a:graphicData uri="http://schemas.openxmlformats.org/drawingml/2006/table">
+            <a:tbl>
+              <a:tblPr firstRow="1" bandRow="1">
+                <a:tableStyleId>{5C22544A-7EE6-4342-B048-85BDC9FD1C3A}</a:tableStyleId>
+              </a:tblPr>
+              <a:tblGrid>
+                <a:gridCol w="5440680"/>
+                <a:gridCol w="5440680"/>
+              </a:tblGrid>
+              <a:tr h="457200">
+                <a:tc>
+                  <a:txBody>
+                    <a:bodyPr/>
+                    <a:lstStyle/>
+                    <a:p>
+                      <a:pPr>
+                        <a:defRPr b="1" sz="1400">
+                          <a:solidFill>
+                            <a:srgbClr val="FFFFFF"/>
+                          </a:solidFill>
+                        </a:defRPr>
+                      </a:pPr>
+                      <a:r>
+                        <a:t>Class</a:t>
+                      </a:r>
+                    </a:p>
+                  </a:txBody>
+                  <a:tcPr>
+                    <a:solidFill>
+                      <a:srgbClr val="1B4965"/>
+                    </a:solidFill>
+                  </a:tcPr>
+                </a:tc>
+                <a:tc>
+                  <a:txBody>
+                    <a:bodyPr/>
+                    <a:lstStyle/>
+                    <a:p>
+                      <a:pPr>
+                        <a:defRPr b="1" sz="1400">
+                          <a:solidFill>
+                            <a:srgbClr val="FFFFFF"/>
+                          </a:solidFill>
+                        </a:defRPr>
+                      </a:pPr>
+                      <a:r>
+                        <a:t>Meaning</a:t>
+                      </a:r>
+                    </a:p>
+                  </a:txBody>
+                  <a:tcPr>
+                    <a:solidFill>
+                      <a:srgbClr val="1B4965"/>
+                    </a:solidFill>
+                  </a:tcPr>
+                </a:tc>
+              </a:tr>
+              <a:tr h="457200">
+                <a:tc>
+                  <a:txBody>
+                    <a:bodyPr wrap="square"/>
+                    <a:lstStyle/>
+                    <a:p>
+                      <a:pPr>
+                        <a:defRPr sz="1400"/>
+                      </a:pPr>
+                      <a:r>
+                        <a:t>OBSERVED FACT</a:t>
+                      </a:r>
+                    </a:p>
+                  </a:txBody>
+                  <a:tcPr/>
+                </a:tc>
+                <a:tc>
+                  <a:txBody>
+                    <a:bodyPr wrap="square"/>
+                    <a:lstStyle/>
+                    <a:p>
+                      <a:pPr>
+                        <a:defRPr sz="1400"/>
+                      </a:pPr>
+                      <a:r>
+                        <a:t>Primary source, checked on/before cut-off</a:t>
+                      </a:r>
+                    </a:p>
+                  </a:txBody>
+                  <a:tcPr/>
+                </a:tc>
+              </a:tr>
+              <a:tr h="457200">
+                <a:tc>
+                  <a:txBody>
+                    <a:bodyPr wrap="square"/>
+                    <a:lstStyle/>
+                    <a:p>
+                      <a:pPr>
+                        <a:defRPr sz="1400"/>
+                      </a:pPr>
+                      <a:r>
+                        <a:t>ATTRIBUTED STATEMENT</a:t>
+                      </a:r>
+                    </a:p>
+                  </a:txBody>
+                  <a:tcPr/>
+                </a:tc>
+                <a:tc>
+                  <a:txBody>
+                    <a:bodyPr wrap="square"/>
+                    <a:lstStyle/>
+                    <a:p>
+                      <a:pPr>
+                        <a:defRPr sz="1400"/>
+                      </a:pPr>
+                      <a:r>
+                        <a:t>On-record claim, not auto-proven true</a:t>
+                      </a:r>
+                    </a:p>
+                  </a:txBody>
+                  <a:tcPr/>
+                </a:tc>
+              </a:tr>
+              <a:tr h="457200">
+                <a:tc>
+                  <a:txBody>
+                    <a:bodyPr wrap="square"/>
+                    <a:lstStyle/>
+                    <a:p>
+                      <a:pPr>
+                        <a:defRPr sz="1400"/>
+                      </a:pPr>
+                      <a:r>
+                        <a:t>DERIVED CALCULATION</a:t>
+                      </a:r>
+                    </a:p>
+                  </a:txBody>
+                  <a:tcPr/>
+                </a:tc>
+                <a:tc>
+                  <a:txBody>
+                    <a:bodyPr wrap="square"/>
+                    <a:lstStyle/>
+                    <a:p>
+                      <a:pPr>
+                        <a:defRPr sz="1400"/>
+                      </a:pPr>
+                      <a:r>
+                        <a:t>Formula always shown, never just a result</a:t>
+                      </a:r>
+                    </a:p>
+                  </a:txBody>
+                  <a:tcPr/>
+                </a:tc>
+              </a:tr>
+              <a:tr h="457200">
+                <a:tc>
+                  <a:txBody>
+                    <a:bodyPr wrap="square"/>
+                    <a:lstStyle/>
+                    <a:p>
+                      <a:pPr>
+                        <a:defRPr sz="1400"/>
+                      </a:pPr>
+                      <a:r>
+                        <a:t>SCENARIO ASSUMPTION</a:t>
+                      </a:r>
+                    </a:p>
+                  </a:txBody>
+                  <a:tcPr/>
+                </a:tc>
+                <a:tc>
+                  <a:txBody>
+                    <a:bodyPr wrap="square"/>
+                    <a:lstStyle/>
+                    <a:p>
+                      <a:pPr>
+                        <a:defRPr sz="1400"/>
+                      </a:pPr>
+                      <a:r>
+                        <a:t>Editable input, not a market figure</a:t>
+                      </a:r>
+                    </a:p>
+                  </a:txBody>
+                  <a:tcPr/>
+                </a:tc>
+              </a:tr>
+              <a:tr h="457200">
+                <a:tc>
+                  <a:txBody>
+                    <a:bodyPr wrap="square"/>
+                    <a:lstStyle/>
+                    <a:p>
+                      <a:pPr>
+                        <a:defRPr sz="1400"/>
+                      </a:pPr>
+                      <a:r>
+                        <a:t>INTERPRETATION</a:t>
+                      </a:r>
+                    </a:p>
+                  </a:txBody>
+                  <a:tcPr/>
+                </a:tc>
+                <a:tc>
+                  <a:txBody>
+                    <a:bodyPr wrap="square"/>
+                    <a:lstStyle/>
+                    <a:p>
+                      <a:pPr>
+                        <a:defRPr sz="1400"/>
+                      </a:pPr>
+                      <a:r>
+                        <a:t>Labelled reading, never presented as fact</a:t>
+                      </a:r>
+                    </a:p>
+                  </a:txBody>
+                  <a:tcPr/>
+                </a:tc>
+              </a:tr>
+            </a:tbl>
+          </a:graphicData>
+        </a:graphic>
+      </p:graphicFrame>
+      <p:sp>
+        <p:nvSpPr>
+          <p:cNvPr id="5" name="TextBox 4"/>
+          <p:cNvSpPr txBox="1"/>
+          <p:nvPr/>
+        </p:nvSpPr>
+        <p:spPr>
+          <a:xfrm>
+            <a:off x="640080" y="4572000"/>
+            <a:ext cx="10881360" cy="1463040"/>
+          </a:xfrm>
+          <a:prstGeom prst="rect">
+            <a:avLst/>
+          </a:prstGeom>
+          <a:noFill/>
+        </p:spPr>
+        <p:txBody>
+          <a:bodyPr wrap="square">
+            <a:spAutoFit/>
+          </a:bodyPr>
+          <a:lstStyle/>
+          <a:p>
+            <a:pPr>
+              <a:spcAft>
+                <a:spcPts val="1000"/>
+              </a:spcAft>
+              <a:defRPr sz="1800">
+                <a:solidFill>
+                  <a:srgbClr val="222222"/>
+                </a:solidFill>
+              </a:defRPr>
+            </a:pPr>
+            <a:r>
+              <a:t>•  Every claim in this deck carries one of these five tags, exactly as in the source paper.</a:t>
+            </a:r>
+          </a:p>
+          <a:p>
+            <a:pPr>
+              <a:spcAft>
+                <a:spcPts val="1000"/>
+              </a:spcAft>
+              <a:defRPr sz="1800">
+                <a:solidFill>
+                  <a:srgbClr val="222222"/>
+                </a:solidFill>
+              </a:defRPr>
+            </a:pPr>
+            <a:r>
+              <a:t>•  No fabricated quotes, figures, or URLs; unverifiable items are labelled UNVERIFIABLE rather than smoothed over.</a:t>
+            </a:r>
+          </a:p>
+        </p:txBody>
+      </p:sp>
+      <p:sp>
+        <p:nvSpPr>
+          <p:cNvPr id="6" name="TextBox 5"/>
+          <p:cNvSpPr txBox="1"/>
+          <p:nvPr/>
+        </p:nvSpPr>
+        <p:spPr>
+          <a:xfrm>
+            <a:off x="548640" y="6446520"/>
+            <a:ext cx="10972800" cy="320040"/>
+          </a:xfrm>
+          <a:prstGeom prst="rect">
+            <a:avLst/>
+          </a:prstGeom>
+          <a:noFill/>
+        </p:spPr>
+        <p:txBody>
+          <a:bodyPr wrap="none">
+            <a:spAutoFit/>
+          </a:bodyPr>
+          <a:lstStyle/>
+          <a:p>
+            <a:pPr>
+              <a:defRPr sz="1000" i="1">
+                <a:solidFill>
+                  <a:srgbClr val="444444"/>
+                </a:solidFill>
+              </a:defRPr>
+            </a:pPr>
+            <a:r>
+              <a:t>CC BY 4.0 — Valto Loikkanen — factual source cut-off 2026-08-13</a:t>
+            </a:r>
+          </a:p>
+        </p:txBody>
+      </p:sp>
+    </p:spTree>
+  </p:cSld>
+  <p:clrMapOvr>
+    <a:masterClrMapping/>
+  </p:clrMapOvr>
+</p:sld>
+</file>
+
+<file path=ppt/slides/slide20.xml><?xml version="1.0" encoding="utf-8"?>
 <p:sld xmlns:a="http://schemas.openxmlformats.org/drawingml/2006/main" xmlns:p="http://schemas.openxmlformats.org/presentationml/2006/main" xmlns:r="http://schemas.openxmlformats.org/officeDocument/2006/relationships">
   <p:cSld>
     <p:spTree>
@@ -7606,7 +8318,7 @@
 </p:sld>
 </file>
 
-<file path=ppt/slides/slide2.xml><?xml version="1.0" encoding="utf-8"?>
+<file path=ppt/slides/slide21.xml><?xml version="1.0" encoding="utf-8"?>
 <p:sld xmlns:a="http://schemas.openxmlformats.org/drawingml/2006/main" xmlns:p="http://schemas.openxmlformats.org/presentationml/2006/main" xmlns:r="http://schemas.openxmlformats.org/officeDocument/2006/relationships">
   <p:cSld>
     <p:spTree>
@@ -7689,255 +8401,21 @@
               </a:defRPr>
             </a:pPr>
             <a:r>
-              <a:t>Method: Five Evidence Classes</a:t>
-            </a:r>
-          </a:p>
-        </p:txBody>
-      </p:sp>
-      <p:graphicFrame>
-        <p:nvGraphicFramePr>
-          <p:cNvPr id="4" name="Table 3"/>
-          <p:cNvGraphicFramePr>
-            <a:graphicFrameLocks noGrp="1"/>
-          </p:cNvGraphicFramePr>
-          <p:nvPr/>
-        </p:nvGraphicFramePr>
-        <p:xfrm>
-          <a:off x="640080" y="1463040"/>
-          <a:ext cx="10881360" cy="2743200"/>
-        </p:xfrm>
-        <a:graphic>
-          <a:graphicData uri="http://schemas.openxmlformats.org/drawingml/2006/table">
-            <a:tbl>
-              <a:tblPr firstRow="1" bandRow="1">
-                <a:tableStyleId>{5C22544A-7EE6-4342-B048-85BDC9FD1C3A}</a:tableStyleId>
-              </a:tblPr>
-              <a:tblGrid>
-                <a:gridCol w="5440680"/>
-                <a:gridCol w="5440680"/>
-              </a:tblGrid>
-              <a:tr h="457200">
-                <a:tc>
-                  <a:txBody>
-                    <a:bodyPr/>
-                    <a:lstStyle/>
-                    <a:p>
-                      <a:pPr>
-                        <a:defRPr b="1" sz="1400">
-                          <a:solidFill>
-                            <a:srgbClr val="FFFFFF"/>
-                          </a:solidFill>
-                        </a:defRPr>
-                      </a:pPr>
-                      <a:r>
-                        <a:t>Class</a:t>
-                      </a:r>
-                    </a:p>
-                  </a:txBody>
-                  <a:tcPr>
-                    <a:solidFill>
-                      <a:srgbClr val="1B4965"/>
-                    </a:solidFill>
-                  </a:tcPr>
-                </a:tc>
-                <a:tc>
-                  <a:txBody>
-                    <a:bodyPr/>
-                    <a:lstStyle/>
-                    <a:p>
-                      <a:pPr>
-                        <a:defRPr b="1" sz="1400">
-                          <a:solidFill>
-                            <a:srgbClr val="FFFFFF"/>
-                          </a:solidFill>
-                        </a:defRPr>
-                      </a:pPr>
-                      <a:r>
-                        <a:t>Meaning</a:t>
-                      </a:r>
-                    </a:p>
-                  </a:txBody>
-                  <a:tcPr>
-                    <a:solidFill>
-                      <a:srgbClr val="1B4965"/>
-                    </a:solidFill>
-                  </a:tcPr>
-                </a:tc>
-              </a:tr>
-              <a:tr h="457200">
-                <a:tc>
-                  <a:txBody>
-                    <a:bodyPr wrap="square"/>
-                    <a:lstStyle/>
-                    <a:p>
-                      <a:pPr>
-                        <a:defRPr sz="1400"/>
-                      </a:pPr>
-                      <a:r>
-                        <a:t>OBSERVED FACT</a:t>
-                      </a:r>
-                    </a:p>
-                  </a:txBody>
-                  <a:tcPr/>
-                </a:tc>
-                <a:tc>
-                  <a:txBody>
-                    <a:bodyPr wrap="square"/>
-                    <a:lstStyle/>
-                    <a:p>
-                      <a:pPr>
-                        <a:defRPr sz="1400"/>
-                      </a:pPr>
-                      <a:r>
-                        <a:t>Primary source, checked on/before cut-off</a:t>
-                      </a:r>
-                    </a:p>
-                  </a:txBody>
-                  <a:tcPr/>
-                </a:tc>
-              </a:tr>
-              <a:tr h="457200">
-                <a:tc>
-                  <a:txBody>
-                    <a:bodyPr wrap="square"/>
-                    <a:lstStyle/>
-                    <a:p>
-                      <a:pPr>
-                        <a:defRPr sz="1400"/>
-                      </a:pPr>
-                      <a:r>
-                        <a:t>ATTRIBUTED STATEMENT</a:t>
-                      </a:r>
-                    </a:p>
-                  </a:txBody>
-                  <a:tcPr/>
-                </a:tc>
-                <a:tc>
-                  <a:txBody>
-                    <a:bodyPr wrap="square"/>
-                    <a:lstStyle/>
-                    <a:p>
-                      <a:pPr>
-                        <a:defRPr sz="1400"/>
-                      </a:pPr>
-                      <a:r>
-                        <a:t>On-record claim, not auto-proven true</a:t>
-                      </a:r>
-                    </a:p>
-                  </a:txBody>
-                  <a:tcPr/>
-                </a:tc>
-              </a:tr>
-              <a:tr h="457200">
-                <a:tc>
-                  <a:txBody>
-                    <a:bodyPr wrap="square"/>
-                    <a:lstStyle/>
-                    <a:p>
-                      <a:pPr>
-                        <a:defRPr sz="1400"/>
-                      </a:pPr>
-                      <a:r>
-                        <a:t>DERIVED CALCULATION</a:t>
-                      </a:r>
-                    </a:p>
-                  </a:txBody>
-                  <a:tcPr/>
-                </a:tc>
-                <a:tc>
-                  <a:txBody>
-                    <a:bodyPr wrap="square"/>
-                    <a:lstStyle/>
-                    <a:p>
-                      <a:pPr>
-                        <a:defRPr sz="1400"/>
-                      </a:pPr>
-                      <a:r>
-                        <a:t>Formula always shown, never just a result</a:t>
-                      </a:r>
-                    </a:p>
-                  </a:txBody>
-                  <a:tcPr/>
-                </a:tc>
-              </a:tr>
-              <a:tr h="457200">
-                <a:tc>
-                  <a:txBody>
-                    <a:bodyPr wrap="square"/>
-                    <a:lstStyle/>
-                    <a:p>
-                      <a:pPr>
-                        <a:defRPr sz="1400"/>
-                      </a:pPr>
-                      <a:r>
-                        <a:t>SCENARIO ASSUMPTION</a:t>
-                      </a:r>
-                    </a:p>
-                  </a:txBody>
-                  <a:tcPr/>
-                </a:tc>
-                <a:tc>
-                  <a:txBody>
-                    <a:bodyPr wrap="square"/>
-                    <a:lstStyle/>
-                    <a:p>
-                      <a:pPr>
-                        <a:defRPr sz="1400"/>
-                      </a:pPr>
-                      <a:r>
-                        <a:t>Editable input, not a market figure</a:t>
-                      </a:r>
-                    </a:p>
-                  </a:txBody>
-                  <a:tcPr/>
-                </a:tc>
-              </a:tr>
-              <a:tr h="457200">
-                <a:tc>
-                  <a:txBody>
-                    <a:bodyPr wrap="square"/>
-                    <a:lstStyle/>
-                    <a:p>
-                      <a:pPr>
-                        <a:defRPr sz="1400"/>
-                      </a:pPr>
-                      <a:r>
-                        <a:t>INTERPRETATION</a:t>
-                      </a:r>
-                    </a:p>
-                  </a:txBody>
-                  <a:tcPr/>
-                </a:tc>
-                <a:tc>
-                  <a:txBody>
-                    <a:bodyPr wrap="square"/>
-                    <a:lstStyle/>
-                    <a:p>
-                      <a:pPr>
-                        <a:defRPr sz="1400"/>
-                      </a:pPr>
-                      <a:r>
-                        <a:t>Labelled reading, never presented as fact</a:t>
-                      </a:r>
-                    </a:p>
-                  </a:txBody>
-                  <a:tcPr/>
-                </a:tc>
-              </a:tr>
-            </a:tbl>
-          </a:graphicData>
-        </a:graphic>
-      </p:graphicFrame>
-      <p:sp>
-        <p:nvSpPr>
-          <p:cNvPr id="5" name="TextBox 4"/>
+              <a:t>Electricity-Grid Analogy and Digital Sovereignty Beyond Geography</a:t>
+            </a:r>
+          </a:p>
+        </p:txBody>
+      </p:sp>
+      <p:sp>
+        <p:nvSpPr>
+          <p:cNvPr id="4" name="TextBox 3"/>
           <p:cNvSpPr txBox="1"/>
           <p:nvPr/>
         </p:nvSpPr>
         <p:spPr>
           <a:xfrm>
-            <a:off x="640080" y="4572000"/>
-            <a:ext cx="10881360" cy="1463040"/>
+            <a:off x="640080" y="1371600"/>
+            <a:ext cx="10881360" cy="4389120"/>
           </a:xfrm>
           <a:prstGeom prst="rect">
             <a:avLst/>
@@ -7961,7 +8439,7 @@
               </a:defRPr>
             </a:pPr>
             <a:r>
-              <a:t>•  Every claim in this deck carries one of these five tags, exactly as in the source paper.</a:t>
+              <a:t>•  Analogy: home solar → cooperative → commercial producer → utility-scale plant → grid exchange, mapped onto AI compute tiers [INTERP, author's own commentary]</a:t>
             </a:r>
           </a:p>
           <a:p>
@@ -7976,14 +8454,29 @@
               </a:defRPr>
             </a:pPr>
             <a:r>
-              <a:t>•  No fabricated quotes, figures, or URLs; unverifiable items are labelled UNVERIFIABLE rather than smoothed over.</a:t>
-            </a:r>
-          </a:p>
-        </p:txBody>
-      </p:sp>
-      <p:sp>
-        <p:nvSpPr>
-          <p:cNvPr id="6" name="TextBox 5"/>
+              <a:t>•  Weakest link: no frictionless spot market for AI compute yet exists, unlike electricity or Bitcoin hashrate [FACT/INTERP]</a:t>
+            </a:r>
+          </a:p>
+          <a:p>
+            <a:pPr>
+              <a:spcAft>
+                <a:spcPts val="1000"/>
+              </a:spcAft>
+              <a:defRPr sz="1800">
+                <a:solidFill>
+                  <a:srgbClr val="222222"/>
+                </a:solidFill>
+              </a:defRPr>
+            </a:pPr>
+            <a:r>
+              <a:t>•  Sovereignty reframed via five questions: control, portability, exit, governance, continuity — not just server geography [INTERP, framework proposed in this paper]</a:t>
+            </a:r>
+          </a:p>
+        </p:txBody>
+      </p:sp>
+      <p:sp>
+        <p:nvSpPr>
+          <p:cNvPr id="5" name="TextBox 4"/>
           <p:cNvSpPr txBox="1"/>
           <p:nvPr/>
         </p:nvSpPr>
@@ -8024,206 +8517,7 @@
 </p:sld>
 </file>
 
-<file path=ppt/slides/slide20.xml><?xml version="1.0" encoding="utf-8"?>
-<p:sld xmlns:a="http://schemas.openxmlformats.org/drawingml/2006/main" xmlns:p="http://schemas.openxmlformats.org/presentationml/2006/main" xmlns:r="http://schemas.openxmlformats.org/officeDocument/2006/relationships">
-  <p:cSld>
-    <p:spTree>
-      <p:nvGrpSpPr>
-        <p:cNvPr id="1" name=""/>
-        <p:cNvGrpSpPr/>
-        <p:nvPr/>
-      </p:nvGrpSpPr>
-      <p:grpSpPr/>
-      <p:sp>
-        <p:nvSpPr>
-          <p:cNvPr id="2" name="Rectangle 1"/>
-          <p:cNvSpPr/>
-          <p:nvPr/>
-        </p:nvSpPr>
-        <p:spPr>
-          <a:xfrm>
-            <a:off x="0" y="0"/>
-            <a:ext cx="164592" cy="6858000"/>
-          </a:xfrm>
-          <a:prstGeom prst="rect">
-            <a:avLst/>
-          </a:prstGeom>
-          <a:solidFill>
-            <a:srgbClr val="1B4965"/>
-          </a:solidFill>
-          <a:ln>
-            <a:noFill/>
-          </a:ln>
-        </p:spPr>
-        <p:style>
-          <a:lnRef idx="1">
-            <a:schemeClr val="accent1"/>
-          </a:lnRef>
-          <a:fillRef idx="3">
-            <a:schemeClr val="accent1"/>
-          </a:fillRef>
-          <a:effectRef idx="2">
-            <a:schemeClr val="accent1"/>
-          </a:effectRef>
-          <a:fontRef idx="minor">
-            <a:schemeClr val="lt1"/>
-          </a:fontRef>
-        </p:style>
-        <p:txBody>
-          <a:bodyPr rtlCol="0" anchor="ctr"/>
-          <a:lstStyle/>
-          <a:p>
-            <a:pPr algn="ctr"/>
-          </a:p>
-        </p:txBody>
-      </p:sp>
-      <p:sp>
-        <p:nvSpPr>
-          <p:cNvPr id="3" name="TextBox 2"/>
-          <p:cNvSpPr txBox="1"/>
-          <p:nvPr/>
-        </p:nvSpPr>
-        <p:spPr>
-          <a:xfrm>
-            <a:off x="548640" y="320040"/>
-            <a:ext cx="11155680" cy="914400"/>
-          </a:xfrm>
-          <a:prstGeom prst="rect">
-            <a:avLst/>
-          </a:prstGeom>
-          <a:noFill/>
-        </p:spPr>
-        <p:txBody>
-          <a:bodyPr wrap="square">
-            <a:spAutoFit/>
-          </a:bodyPr>
-          <a:lstStyle/>
-          <a:p>
-            <a:pPr>
-              <a:defRPr sz="3200" b="1">
-                <a:solidFill>
-                  <a:srgbClr val="0D1B2A"/>
-                </a:solidFill>
-              </a:defRPr>
-            </a:pPr>
-            <a:r>
-              <a:t>Electricity-Grid Analogy and Digital Sovereignty Beyond Geography</a:t>
-            </a:r>
-          </a:p>
-        </p:txBody>
-      </p:sp>
-      <p:sp>
-        <p:nvSpPr>
-          <p:cNvPr id="4" name="TextBox 3"/>
-          <p:cNvSpPr txBox="1"/>
-          <p:nvPr/>
-        </p:nvSpPr>
-        <p:spPr>
-          <a:xfrm>
-            <a:off x="640080" y="1371600"/>
-            <a:ext cx="10881360" cy="4389120"/>
-          </a:xfrm>
-          <a:prstGeom prst="rect">
-            <a:avLst/>
-          </a:prstGeom>
-          <a:noFill/>
-        </p:spPr>
-        <p:txBody>
-          <a:bodyPr wrap="square">
-            <a:spAutoFit/>
-          </a:bodyPr>
-          <a:lstStyle/>
-          <a:p>
-            <a:pPr>
-              <a:spcAft>
-                <a:spcPts val="1000"/>
-              </a:spcAft>
-              <a:defRPr sz="1800">
-                <a:solidFill>
-                  <a:srgbClr val="222222"/>
-                </a:solidFill>
-              </a:defRPr>
-            </a:pPr>
-            <a:r>
-              <a:t>•  Analogy: home solar → cooperative → commercial producer → utility-scale plant → grid exchange, mapped onto AI compute tiers [INTERP, author's own commentary]</a:t>
-            </a:r>
-          </a:p>
-          <a:p>
-            <a:pPr>
-              <a:spcAft>
-                <a:spcPts val="1000"/>
-              </a:spcAft>
-              <a:defRPr sz="1800">
-                <a:solidFill>
-                  <a:srgbClr val="222222"/>
-                </a:solidFill>
-              </a:defRPr>
-            </a:pPr>
-            <a:r>
-              <a:t>•  Weakest link: no frictionless spot market for AI compute yet exists, unlike electricity or Bitcoin hashrate [FACT/INTERP]</a:t>
-            </a:r>
-          </a:p>
-          <a:p>
-            <a:pPr>
-              <a:spcAft>
-                <a:spcPts val="1000"/>
-              </a:spcAft>
-              <a:defRPr sz="1800">
-                <a:solidFill>
-                  <a:srgbClr val="222222"/>
-                </a:solidFill>
-              </a:defRPr>
-            </a:pPr>
-            <a:r>
-              <a:t>•  Sovereignty reframed via five questions: control, portability, exit, governance, continuity — not just server geography [INTERP, framework proposed in this paper]</a:t>
-            </a:r>
-          </a:p>
-        </p:txBody>
-      </p:sp>
-      <p:sp>
-        <p:nvSpPr>
-          <p:cNvPr id="5" name="TextBox 4"/>
-          <p:cNvSpPr txBox="1"/>
-          <p:nvPr/>
-        </p:nvSpPr>
-        <p:spPr>
-          <a:xfrm>
-            <a:off x="548640" y="6446520"/>
-            <a:ext cx="10972800" cy="320040"/>
-          </a:xfrm>
-          <a:prstGeom prst="rect">
-            <a:avLst/>
-          </a:prstGeom>
-          <a:noFill/>
-        </p:spPr>
-        <p:txBody>
-          <a:bodyPr wrap="none">
-            <a:spAutoFit/>
-          </a:bodyPr>
-          <a:lstStyle/>
-          <a:p>
-            <a:pPr>
-              <a:defRPr sz="1000" i="1">
-                <a:solidFill>
-                  <a:srgbClr val="444444"/>
-                </a:solidFill>
-              </a:defRPr>
-            </a:pPr>
-            <a:r>
-              <a:t>CC BY 4.0 — Valto Loikkanen — factual source cut-off 2026-08-13</a:t>
-            </a:r>
-          </a:p>
-        </p:txBody>
-      </p:sp>
-    </p:spTree>
-  </p:cSld>
-  <p:clrMapOvr>
-    <a:masterClrMapping/>
-  </p:clrMapOvr>
-</p:sld>
-</file>
-
-<file path=ppt/slides/slide21.xml><?xml version="1.0" encoding="utf-8"?>
+<file path=ppt/slides/slide22.xml><?xml version="1.0" encoding="utf-8"?>
 <p:sld xmlns:a="http://schemas.openxmlformats.org/drawingml/2006/main" xmlns:p="http://schemas.openxmlformats.org/presentationml/2006/main" xmlns:r="http://schemas.openxmlformats.org/officeDocument/2006/relationships">
   <p:cSld>
     <p:spTree>
@@ -8693,7 +8987,7 @@
 </p:sld>
 </file>
 
-<file path=ppt/slides/slide22.xml><?xml version="1.0" encoding="utf-8"?>
+<file path=ppt/slides/slide23.xml><?xml version="1.0" encoding="utf-8"?>
 <p:sld xmlns:a="http://schemas.openxmlformats.org/drawingml/2006/main" xmlns:p="http://schemas.openxmlformats.org/presentationml/2006/main" xmlns:r="http://schemas.openxmlformats.org/officeDocument/2006/relationships">
   <p:cSld>
     <p:spTree>
@@ -8845,205 +9139,6 @@
             </a:pPr>
             <a:r>
               <a:t>•  Scope explicitly narrow: excludes supervision, insurance, downtime — every figure is a cost floor, not a full commercial cost</a:t>
-            </a:r>
-          </a:p>
-        </p:txBody>
-      </p:sp>
-      <p:sp>
-        <p:nvSpPr>
-          <p:cNvPr id="5" name="TextBox 4"/>
-          <p:cNvSpPr txBox="1"/>
-          <p:nvPr/>
-        </p:nvSpPr>
-        <p:spPr>
-          <a:xfrm>
-            <a:off x="548640" y="6446520"/>
-            <a:ext cx="10972800" cy="320040"/>
-          </a:xfrm>
-          <a:prstGeom prst="rect">
-            <a:avLst/>
-          </a:prstGeom>
-          <a:noFill/>
-        </p:spPr>
-        <p:txBody>
-          <a:bodyPr wrap="none">
-            <a:spAutoFit/>
-          </a:bodyPr>
-          <a:lstStyle/>
-          <a:p>
-            <a:pPr>
-              <a:defRPr sz="1000" i="1">
-                <a:solidFill>
-                  <a:srgbClr val="444444"/>
-                </a:solidFill>
-              </a:defRPr>
-            </a:pPr>
-            <a:r>
-              <a:t>CC BY 4.0 — Valto Loikkanen — factual source cut-off 2026-08-13</a:t>
-            </a:r>
-          </a:p>
-        </p:txBody>
-      </p:sp>
-    </p:spTree>
-  </p:cSld>
-  <p:clrMapOvr>
-    <a:masterClrMapping/>
-  </p:clrMapOvr>
-</p:sld>
-</file>
-
-<file path=ppt/slides/slide23.xml><?xml version="1.0" encoding="utf-8"?>
-<p:sld xmlns:a="http://schemas.openxmlformats.org/drawingml/2006/main" xmlns:p="http://schemas.openxmlformats.org/presentationml/2006/main" xmlns:r="http://schemas.openxmlformats.org/officeDocument/2006/relationships">
-  <p:cSld>
-    <p:spTree>
-      <p:nvGrpSpPr>
-        <p:cNvPr id="1" name=""/>
-        <p:cNvGrpSpPr/>
-        <p:nvPr/>
-      </p:nvGrpSpPr>
-      <p:grpSpPr/>
-      <p:sp>
-        <p:nvSpPr>
-          <p:cNvPr id="2" name="Rectangle 1"/>
-          <p:cNvSpPr/>
-          <p:nvPr/>
-        </p:nvSpPr>
-        <p:spPr>
-          <a:xfrm>
-            <a:off x="0" y="0"/>
-            <a:ext cx="164592" cy="6858000"/>
-          </a:xfrm>
-          <a:prstGeom prst="rect">
-            <a:avLst/>
-          </a:prstGeom>
-          <a:solidFill>
-            <a:srgbClr val="1B4965"/>
-          </a:solidFill>
-          <a:ln>
-            <a:noFill/>
-          </a:ln>
-        </p:spPr>
-        <p:style>
-          <a:lnRef idx="1">
-            <a:schemeClr val="accent1"/>
-          </a:lnRef>
-          <a:fillRef idx="3">
-            <a:schemeClr val="accent1"/>
-          </a:fillRef>
-          <a:effectRef idx="2">
-            <a:schemeClr val="accent1"/>
-          </a:effectRef>
-          <a:fontRef idx="minor">
-            <a:schemeClr val="lt1"/>
-          </a:fontRef>
-        </p:style>
-        <p:txBody>
-          <a:bodyPr rtlCol="0" anchor="ctr"/>
-          <a:lstStyle/>
-          <a:p>
-            <a:pPr algn="ctr"/>
-          </a:p>
-        </p:txBody>
-      </p:sp>
-      <p:sp>
-        <p:nvSpPr>
-          <p:cNvPr id="3" name="TextBox 2"/>
-          <p:cNvSpPr txBox="1"/>
-          <p:nvPr/>
-        </p:nvSpPr>
-        <p:spPr>
-          <a:xfrm>
-            <a:off x="548640" y="320040"/>
-            <a:ext cx="11155680" cy="914400"/>
-          </a:xfrm>
-          <a:prstGeom prst="rect">
-            <a:avLst/>
-          </a:prstGeom>
-          <a:noFill/>
-        </p:spPr>
-        <p:txBody>
-          <a:bodyPr wrap="square">
-            <a:spAutoFit/>
-          </a:bodyPr>
-          <a:lstStyle/>
-          <a:p>
-            <a:pPr>
-              <a:defRPr sz="3200" b="1">
-                <a:solidFill>
-                  <a:srgbClr val="0D1B2A"/>
-                </a:solidFill>
-              </a:defRPr>
-            </a:pPr>
-            <a:r>
-              <a:t>Part VII: Six Lenses, Equal Weight, No Ranking</a:t>
-            </a:r>
-          </a:p>
-        </p:txBody>
-      </p:sp>
-      <p:sp>
-        <p:nvSpPr>
-          <p:cNvPr id="4" name="TextBox 3"/>
-          <p:cNvSpPr txBox="1"/>
-          <p:nvPr/>
-        </p:nvSpPr>
-        <p:spPr>
-          <a:xfrm>
-            <a:off x="640080" y="1371600"/>
-            <a:ext cx="10881360" cy="4389120"/>
-          </a:xfrm>
-          <a:prstGeom prst="rect">
-            <a:avLst/>
-          </a:prstGeom>
-          <a:noFill/>
-        </p:spPr>
-        <p:txBody>
-          <a:bodyPr wrap="square">
-            <a:spAutoFit/>
-          </a:bodyPr>
-          <a:lstStyle/>
-          <a:p>
-            <a:pPr>
-              <a:spcAft>
-                <a:spcPts val="1000"/>
-              </a:spcAft>
-              <a:defRPr sz="1800">
-                <a:solidFill>
-                  <a:srgbClr val="222222"/>
-                </a:solidFill>
-              </a:defRPr>
-            </a:pPr>
-            <a:r>
-              <a:t>•  Individual: rent vs. own break-even sits near the copilot band, not chat band</a:t>
-            </a:r>
-          </a:p>
-          <a:p>
-            <a:pPr>
-              <a:spcAft>
-                <a:spcPts val="1000"/>
-              </a:spcAft>
-              <a:defRPr sz="1800">
-                <a:solidFill>
-                  <a:srgbClr val="222222"/>
-                </a:solidFill>
-              </a:defRPr>
-            </a:pPr>
-            <a:r>
-              <a:t>•  SME: delivery innovation, not product innovation, is the accessible opportunity [ATTR, author's prior work]</a:t>
-            </a:r>
-          </a:p>
-          <a:p>
-            <a:pPr>
-              <a:spcAft>
-                <a:spcPts val="1000"/>
-              </a:spcAft>
-              <a:defRPr sz="1800">
-                <a:solidFill>
-                  <a:srgbClr val="222222"/>
-                </a:solidFill>
-              </a:defRPr>
-            </a:pPr>
-            <a:r>
-              <a:t>•  Investor/Government/Builder/Educator: same MOU and cost figures, read through different risk lenses — interested-party statements (Huang, Fink) flagged consistently as ATTR, not audited fact</a:t>
             </a:r>
           </a:p>
         </p:txBody>
@@ -9174,7 +9269,7 @@
               </a:defRPr>
             </a:pPr>
             <a:r>
-              <a:t>Closing: Opportunity, Not Inevitability</a:t>
+              <a:t>Part VII: Six Lenses, Equal Weight, No Ranking</a:t>
             </a:r>
           </a:p>
         </p:txBody>
@@ -9212,7 +9307,7 @@
               </a:defRPr>
             </a:pPr>
             <a:r>
-              <a:t>•  Capital and infrastructure figures (Parts II-IV) support reading this as opportunity, not destiny [INTERP, editorial choice]</a:t>
+              <a:t>•  Individual: rent vs. own break-even sits near the copilot band, not chat band</a:t>
             </a:r>
           </a:p>
           <a:p>
@@ -9227,7 +9322,7 @@
               </a:defRPr>
             </a:pPr>
             <a:r>
-              <a:t>•  The unknown variable: adoption, organizational change, and time — not model capability — appear to be the binding constraint [INTERP]</a:t>
+              <a:t>•  SME: delivery innovation, not product innovation, is the accessible opportunity [ATTR, author's prior work]</a:t>
             </a:r>
           </a:p>
           <a:p>
@@ -9242,7 +9337,7 @@
               </a:defRPr>
             </a:pPr>
             <a:r>
-              <a:t>•  Closing synthesis: "how do we get it done" is getting cheaper faster than most say plainly; "what should we do" has not gotten any easier at all</a:t>
+              <a:t>•  Investor/Government/Builder/Educator: same MOU and cost figures, read through different risk lenses — interested-party statements (Huang, Fink) flagged consistently as ATTR, not audited fact</a:t>
             </a:r>
           </a:p>
         </p:txBody>
@@ -9291,6 +9386,205 @@
 </file>
 
 <file path=ppt/slides/slide25.xml><?xml version="1.0" encoding="utf-8"?>
+<p:sld xmlns:a="http://schemas.openxmlformats.org/drawingml/2006/main" xmlns:p="http://schemas.openxmlformats.org/presentationml/2006/main" xmlns:r="http://schemas.openxmlformats.org/officeDocument/2006/relationships">
+  <p:cSld>
+    <p:spTree>
+      <p:nvGrpSpPr>
+        <p:cNvPr id="1" name=""/>
+        <p:cNvGrpSpPr/>
+        <p:nvPr/>
+      </p:nvGrpSpPr>
+      <p:grpSpPr/>
+      <p:sp>
+        <p:nvSpPr>
+          <p:cNvPr id="2" name="Rectangle 1"/>
+          <p:cNvSpPr/>
+          <p:nvPr/>
+        </p:nvSpPr>
+        <p:spPr>
+          <a:xfrm>
+            <a:off x="0" y="0"/>
+            <a:ext cx="164592" cy="6858000"/>
+          </a:xfrm>
+          <a:prstGeom prst="rect">
+            <a:avLst/>
+          </a:prstGeom>
+          <a:solidFill>
+            <a:srgbClr val="1B4965"/>
+          </a:solidFill>
+          <a:ln>
+            <a:noFill/>
+          </a:ln>
+        </p:spPr>
+        <p:style>
+          <a:lnRef idx="1">
+            <a:schemeClr val="accent1"/>
+          </a:lnRef>
+          <a:fillRef idx="3">
+            <a:schemeClr val="accent1"/>
+          </a:fillRef>
+          <a:effectRef idx="2">
+            <a:schemeClr val="accent1"/>
+          </a:effectRef>
+          <a:fontRef idx="minor">
+            <a:schemeClr val="lt1"/>
+          </a:fontRef>
+        </p:style>
+        <p:txBody>
+          <a:bodyPr rtlCol="0" anchor="ctr"/>
+          <a:lstStyle/>
+          <a:p>
+            <a:pPr algn="ctr"/>
+          </a:p>
+        </p:txBody>
+      </p:sp>
+      <p:sp>
+        <p:nvSpPr>
+          <p:cNvPr id="3" name="TextBox 2"/>
+          <p:cNvSpPr txBox="1"/>
+          <p:nvPr/>
+        </p:nvSpPr>
+        <p:spPr>
+          <a:xfrm>
+            <a:off x="548640" y="320040"/>
+            <a:ext cx="11155680" cy="914400"/>
+          </a:xfrm>
+          <a:prstGeom prst="rect">
+            <a:avLst/>
+          </a:prstGeom>
+          <a:noFill/>
+        </p:spPr>
+        <p:txBody>
+          <a:bodyPr wrap="square">
+            <a:spAutoFit/>
+          </a:bodyPr>
+          <a:lstStyle/>
+          <a:p>
+            <a:pPr>
+              <a:defRPr sz="3200" b="1">
+                <a:solidFill>
+                  <a:srgbClr val="0D1B2A"/>
+                </a:solidFill>
+              </a:defRPr>
+            </a:pPr>
+            <a:r>
+              <a:t>Closing: Opportunity, Not Inevitability</a:t>
+            </a:r>
+          </a:p>
+        </p:txBody>
+      </p:sp>
+      <p:sp>
+        <p:nvSpPr>
+          <p:cNvPr id="4" name="TextBox 3"/>
+          <p:cNvSpPr txBox="1"/>
+          <p:nvPr/>
+        </p:nvSpPr>
+        <p:spPr>
+          <a:xfrm>
+            <a:off x="640080" y="1371600"/>
+            <a:ext cx="10881360" cy="4389120"/>
+          </a:xfrm>
+          <a:prstGeom prst="rect">
+            <a:avLst/>
+          </a:prstGeom>
+          <a:noFill/>
+        </p:spPr>
+        <p:txBody>
+          <a:bodyPr wrap="square">
+            <a:spAutoFit/>
+          </a:bodyPr>
+          <a:lstStyle/>
+          <a:p>
+            <a:pPr>
+              <a:spcAft>
+                <a:spcPts val="1000"/>
+              </a:spcAft>
+              <a:defRPr sz="1800">
+                <a:solidFill>
+                  <a:srgbClr val="222222"/>
+                </a:solidFill>
+              </a:defRPr>
+            </a:pPr>
+            <a:r>
+              <a:t>•  Capital and infrastructure figures (Parts II-IV) support reading this as opportunity, not destiny [INTERP, editorial choice]</a:t>
+            </a:r>
+          </a:p>
+          <a:p>
+            <a:pPr>
+              <a:spcAft>
+                <a:spcPts val="1000"/>
+              </a:spcAft>
+              <a:defRPr sz="1800">
+                <a:solidFill>
+                  <a:srgbClr val="222222"/>
+                </a:solidFill>
+              </a:defRPr>
+            </a:pPr>
+            <a:r>
+              <a:t>•  The unknown variable: adoption, organizational change, and time — not model capability — appear to be the binding constraint [INTERP]</a:t>
+            </a:r>
+          </a:p>
+          <a:p>
+            <a:pPr>
+              <a:spcAft>
+                <a:spcPts val="1000"/>
+              </a:spcAft>
+              <a:defRPr sz="1800">
+                <a:solidFill>
+                  <a:srgbClr val="222222"/>
+                </a:solidFill>
+              </a:defRPr>
+            </a:pPr>
+            <a:r>
+              <a:t>•  Closing synthesis: "how do we get it done" is getting cheaper faster than most say plainly; "what should we do" has not gotten any easier at all</a:t>
+            </a:r>
+          </a:p>
+        </p:txBody>
+      </p:sp>
+      <p:sp>
+        <p:nvSpPr>
+          <p:cNvPr id="5" name="TextBox 4"/>
+          <p:cNvSpPr txBox="1"/>
+          <p:nvPr/>
+        </p:nvSpPr>
+        <p:spPr>
+          <a:xfrm>
+            <a:off x="548640" y="6446520"/>
+            <a:ext cx="10972800" cy="320040"/>
+          </a:xfrm>
+          <a:prstGeom prst="rect">
+            <a:avLst/>
+          </a:prstGeom>
+          <a:noFill/>
+        </p:spPr>
+        <p:txBody>
+          <a:bodyPr wrap="none">
+            <a:spAutoFit/>
+          </a:bodyPr>
+          <a:lstStyle/>
+          <a:p>
+            <a:pPr>
+              <a:defRPr sz="1000" i="1">
+                <a:solidFill>
+                  <a:srgbClr val="444444"/>
+                </a:solidFill>
+              </a:defRPr>
+            </a:pPr>
+            <a:r>
+              <a:t>CC BY 4.0 — Valto Loikkanen — factual source cut-off 2026-08-13</a:t>
+            </a:r>
+          </a:p>
+        </p:txBody>
+      </p:sp>
+    </p:spTree>
+  </p:cSld>
+  <p:clrMapOvr>
+    <a:masterClrMapping/>
+  </p:clrMapOvr>
+</p:sld>
+</file>
+
+<file path=ppt/slides/slide26.xml><?xml version="1.0" encoding="utf-8"?>
 <p:sld xmlns:a="http://schemas.openxmlformats.org/drawingml/2006/main" xmlns:p="http://schemas.openxmlformats.org/presentationml/2006/main" xmlns:r="http://schemas.openxmlformats.org/officeDocument/2006/relationships">
   <p:cSld>
     <p:spTree>

--- a/19-slide-deck.pptx
+++ b/19-slide-deck.pptx
@@ -737,7 +737,7 @@
           <a:lstStyle/>
           <a:p>
             <a:r>
-              <a:t>Band 4's open-ended ceiling is informed by, not proven by, this one company's internal data.</a:t>
+              <a:t>Band 4's open-ended ceiling is informed by, not proven by, this one company's internal data. The table is the guardrail against reading a band-4 figure as "one very fast hour" instead of "many parallel ordinary hours."</a:t>
             </a:r>
           </a:p>
         </p:txBody>
@@ -877,7 +877,7 @@
           <a:lstStyle/>
           <a:p>
             <a:r>
-              <a:t>This is the guardrail slide against naive "$/hour AI vs. $/hour human" headlines.</a:t>
+              <a:t>This is the guardrail slide against naive "$/hour AI vs. $/hour human" headlines — and against the narrower mistake of picking whichever AI number and whichever human number make the best-sounding comparison.</a:t>
             </a:r>
           </a:p>
         </p:txBody>
@@ -5925,7 +5925,7 @@
           <a:lstStyle/>
           <a:p>
             <a:pPr>
-              <a:defRPr sz="3200" b="1">
+              <a:defRPr sz="2800" b="1">
                 <a:solidFill>
                   <a:srgbClr val="0D1B2A"/>
                 </a:solidFill>
@@ -5945,8 +5945,8 @@
         </p:nvSpPr>
         <p:spPr>
           <a:xfrm>
-            <a:off x="640080" y="1371600"/>
-            <a:ext cx="10881360" cy="4389120"/>
+            <a:off x="640080" y="1143000"/>
+            <a:ext cx="10881360" cy="1554480"/>
           </a:xfrm>
           <a:prstGeom prst="rect">
             <a:avLst/>
@@ -5963,7 +5963,7 @@
               <a:spcAft>
                 <a:spcPts val="1000"/>
               </a:spcAft>
-              <a:defRPr sz="1800">
+              <a:defRPr sz="1500">
                 <a:solidFill>
                   <a:srgbClr val="222222"/>
                 </a:solidFill>
@@ -5978,36 +5978,345 @@
               <a:spcAft>
                 <a:spcPts val="1000"/>
               </a:spcAft>
-              <a:defRPr sz="1800">
+              <a:defRPr sz="1500">
                 <a:solidFill>
                   <a:srgbClr val="222222"/>
                 </a:solidFill>
               </a:defRPr>
             </a:pPr>
             <a:r>
-              <a:t>•  OpenAI's own unaudited telemetry: Codex = 99.8% of weekly internal output tokens; 99th-percentile users ran 60+ agent-hours/day [ATTR, OpenAI, self-reported]</a:t>
-            </a:r>
-          </a:p>
+              <a:t>•  OpenAI's own unaudited telemetry: Codex = 99.8% of weekly internal output tokens; 99th-percentile users ran 60+ agent-hours/day [ATTR, OpenAI, self-reported] — not a general-population statistic</a:t>
+            </a:r>
+          </a:p>
+        </p:txBody>
+      </p:sp>
+      <p:graphicFrame>
+        <p:nvGraphicFramePr>
+          <p:cNvPr id="5" name="Table 4"/>
+          <p:cNvGraphicFramePr>
+            <a:graphicFrameLocks noGrp="1"/>
+          </p:cNvGraphicFramePr>
+          <p:nvPr/>
+        </p:nvGraphicFramePr>
+        <p:xfrm>
+          <a:off x="640080" y="2834640"/>
+          <a:ext cx="10881360" cy="2194560"/>
+        </p:xfrm>
+        <a:graphic>
+          <a:graphicData uri="http://schemas.openxmlformats.org/drawingml/2006/table">
+            <a:tbl>
+              <a:tblPr firstRow="1" bandRow="1">
+                <a:tableStyleId>{5C22544A-7EE6-4342-B048-85BDC9FD1C3A}</a:tableStyleId>
+              </a:tblPr>
+              <a:tblGrid>
+                <a:gridCol w="3627120"/>
+                <a:gridCol w="3627120"/>
+                <a:gridCol w="3627120"/>
+              </a:tblGrid>
+              <a:tr h="438912">
+                <a:tc>
+                  <a:txBody>
+                    <a:bodyPr/>
+                    <a:lstStyle/>
+                    <a:p>
+                      <a:pPr>
+                        <a:defRPr b="1" sz="1300">
+                          <a:solidFill>
+                            <a:srgbClr val="FFFFFF"/>
+                          </a:solidFill>
+                        </a:defRPr>
+                      </a:pPr>
+                      <a:r>
+                        <a:t>Working capacity</a:t>
+                      </a:r>
+                    </a:p>
+                  </a:txBody>
+                  <a:tcPr>
+                    <a:solidFill>
+                      <a:srgbClr val="1B4965"/>
+                    </a:solidFill>
+                  </a:tcPr>
+                </a:tc>
+                <a:tc>
+                  <a:txBody>
+                    <a:bodyPr/>
+                    <a:lstStyle/>
+                    <a:p>
+                      <a:pPr>
+                        <a:defRPr b="1" sz="1300">
+                          <a:solidFill>
+                            <a:srgbClr val="FFFFFF"/>
+                          </a:solidFill>
+                        </a:defRPr>
+                      </a:pPr>
+                      <a:r>
+                        <a:t>AI</a:t>
+                      </a:r>
+                    </a:p>
+                  </a:txBody>
+                  <a:tcPr>
+                    <a:solidFill>
+                      <a:srgbClr val="1B4965"/>
+                    </a:solidFill>
+                  </a:tcPr>
+                </a:tc>
+                <a:tc>
+                  <a:txBody>
+                    <a:bodyPr/>
+                    <a:lstStyle/>
+                    <a:p>
+                      <a:pPr>
+                        <a:defRPr b="1" sz="1300">
+                          <a:solidFill>
+                            <a:srgbClr val="FFFFFF"/>
+                          </a:solidFill>
+                        </a:defRPr>
+                      </a:pPr>
+                      <a:r>
+                        <a:t>Human</a:t>
+                      </a:r>
+                    </a:p>
+                  </a:txBody>
+                  <a:tcPr>
+                    <a:solidFill>
+                      <a:srgbClr val="1B4965"/>
+                    </a:solidFill>
+                  </a:tcPr>
+                </a:tc>
+              </a:tr>
+              <a:tr h="438912">
+                <a:tc>
+                  <a:txBody>
+                    <a:bodyPr wrap="square"/>
+                    <a:lstStyle/>
+                    <a:p>
+                      <a:pPr>
+                        <a:defRPr sz="1300"/>
+                      </a:pPr>
+                      <a:r>
+                        <a:t>1 working hour</a:t>
+                      </a:r>
+                    </a:p>
+                  </a:txBody>
+                  <a:tcPr/>
+                </a:tc>
+                <a:tc>
+                  <a:txBody>
+                    <a:bodyPr wrap="square"/>
+                    <a:lstStyle/>
+                    <a:p>
+                      <a:pPr>
+                        <a:defRPr sz="1300"/>
+                      </a:pPr>
+                      <a:r>
+                        <a:t>1 agent x 1h = 1 agent-hour</a:t>
+                      </a:r>
+                    </a:p>
+                  </a:txBody>
+                  <a:tcPr/>
+                </a:tc>
+                <a:tc>
+                  <a:txBody>
+                    <a:bodyPr wrap="square"/>
+                    <a:lstStyle/>
+                    <a:p>
+                      <a:pPr>
+                        <a:defRPr sz="1300"/>
+                      </a:pPr>
+                      <a:r>
+                        <a:t>1 person x 1h = 1 human-hour</a:t>
+                      </a:r>
+                    </a:p>
+                  </a:txBody>
+                  <a:tcPr/>
+                </a:tc>
+              </a:tr>
+              <a:tr h="438912">
+                <a:tc>
+                  <a:txBody>
+                    <a:bodyPr wrap="square"/>
+                    <a:lstStyle/>
+                    <a:p>
+                      <a:pPr>
+                        <a:defRPr sz="1300"/>
+                      </a:pPr>
+                      <a:r>
+                        <a:t>10-team hour</a:t>
+                      </a:r>
+                    </a:p>
+                  </a:txBody>
+                  <a:tcPr/>
+                </a:tc>
+                <a:tc>
+                  <a:txBody>
+                    <a:bodyPr wrap="square"/>
+                    <a:lstStyle/>
+                    <a:p>
+                      <a:pPr>
+                        <a:defRPr sz="1300"/>
+                      </a:pPr>
+                      <a:r>
+                        <a:t>10 agents x 1h = 10 agent-hrs</a:t>
+                      </a:r>
+                    </a:p>
+                  </a:txBody>
+                  <a:tcPr/>
+                </a:tc>
+                <a:tc>
+                  <a:txBody>
+                    <a:bodyPr wrap="square"/>
+                    <a:lstStyle/>
+                    <a:p>
+                      <a:pPr>
+                        <a:defRPr sz="1300"/>
+                      </a:pPr>
+                      <a:r>
+                        <a:t>10 people x 1h = 10 human-hrs</a:t>
+                      </a:r>
+                    </a:p>
+                  </a:txBody>
+                  <a:tcPr/>
+                </a:tc>
+              </a:tr>
+              <a:tr h="438912">
+                <a:tc>
+                  <a:txBody>
+                    <a:bodyPr wrap="square"/>
+                    <a:lstStyle/>
+                    <a:p>
+                      <a:pPr>
+                        <a:defRPr sz="1300"/>
+                      </a:pPr>
+                      <a:r>
+                        <a:t>1 working day</a:t>
+                      </a:r>
+                    </a:p>
+                  </a:txBody>
+                  <a:tcPr/>
+                </a:tc>
+                <a:tc>
+                  <a:txBody>
+                    <a:bodyPr wrap="square"/>
+                    <a:lstStyle/>
+                    <a:p>
+                      <a:pPr>
+                        <a:defRPr sz="1300"/>
+                      </a:pPr>
+                      <a:r>
+                        <a:t>1 agent x 8h = 8 agent-hrs</a:t>
+                      </a:r>
+                    </a:p>
+                  </a:txBody>
+                  <a:tcPr/>
+                </a:tc>
+                <a:tc>
+                  <a:txBody>
+                    <a:bodyPr wrap="square"/>
+                    <a:lstStyle/>
+                    <a:p>
+                      <a:pPr>
+                        <a:defRPr sz="1300"/>
+                      </a:pPr>
+                      <a:r>
+                        <a:t>1 person x 8h = 8 human-hrs</a:t>
+                      </a:r>
+                    </a:p>
+                  </a:txBody>
+                  <a:tcPr/>
+                </a:tc>
+              </a:tr>
+              <a:tr h="438912">
+                <a:tc>
+                  <a:txBody>
+                    <a:bodyPr wrap="square"/>
+                    <a:lstStyle/>
+                    <a:p>
+                      <a:pPr>
+                        <a:defRPr sz="1300"/>
+                      </a:pPr>
+                      <a:r>
+                        <a:t>10-team day</a:t>
+                      </a:r>
+                    </a:p>
+                  </a:txBody>
+                  <a:tcPr/>
+                </a:tc>
+                <a:tc>
+                  <a:txBody>
+                    <a:bodyPr wrap="square"/>
+                    <a:lstStyle/>
+                    <a:p>
+                      <a:pPr>
+                        <a:defRPr sz="1300"/>
+                      </a:pPr>
+                      <a:r>
+                        <a:t>10 agents x 8h = 80 agent-hrs</a:t>
+                      </a:r>
+                    </a:p>
+                  </a:txBody>
+                  <a:tcPr/>
+                </a:tc>
+                <a:tc>
+                  <a:txBody>
+                    <a:bodyPr wrap="square"/>
+                    <a:lstStyle/>
+                    <a:p>
+                      <a:pPr>
+                        <a:defRPr sz="1300"/>
+                      </a:pPr>
+                      <a:r>
+                        <a:t>10 people x 8h = 80 human-hrs</a:t>
+                      </a:r>
+                    </a:p>
+                  </a:txBody>
+                  <a:tcPr/>
+                </a:tc>
+              </a:tr>
+            </a:tbl>
+          </a:graphicData>
+        </a:graphic>
+      </p:graphicFrame>
+      <p:sp>
+        <p:nvSpPr>
+          <p:cNvPr id="6" name="TextBox 5"/>
+          <p:cNvSpPr txBox="1"/>
+          <p:nvPr/>
+        </p:nvSpPr>
+        <p:spPr>
+          <a:xfrm>
+            <a:off x="640080" y="5212080"/>
+            <a:ext cx="10881360" cy="822960"/>
+          </a:xfrm>
+          <a:prstGeom prst="rect">
+            <a:avLst/>
+          </a:prstGeom>
+          <a:noFill/>
+        </p:spPr>
+        <p:txBody>
+          <a:bodyPr wrap="square">
+            <a:spAutoFit/>
+          </a:bodyPr>
+          <a:lstStyle/>
           <a:p>
             <a:pPr>
               <a:spcAft>
                 <a:spcPts val="1000"/>
               </a:spcAft>
-              <a:defRPr sz="1800">
+              <a:defRPr sz="1400">
                 <a:solidFill>
                   <a:srgbClr val="222222"/>
                 </a:solidFill>
               </a:defRPr>
             </a:pPr>
             <a:r>
-              <a:t>•  These describe OpenAI staff using OpenAI's own product — not a general-population statistic [caveat, stated explicitly]</a:t>
-            </a:r>
-          </a:p>
-        </p:txBody>
-      </p:sp>
-      <p:sp>
-        <p:nvSpPr>
-          <p:cNvPr id="5" name="TextBox 4"/>
+              <a:t>•  Orchestration does not create a different kind of hour — it creates multiple working hours in parallel. Team capacity is workers x hours, on both sides, with no exception.</a:t>
+            </a:r>
+          </a:p>
+        </p:txBody>
+      </p:sp>
+      <p:sp>
+        <p:nvSpPr>
+          <p:cNvPr id="7" name="TextBox 6"/>
           <p:cNvSpPr txBox="1"/>
           <p:nvPr/>
         </p:nvSpPr>
@@ -6323,7 +6632,7 @@
           <a:lstStyle/>
           <a:p>
             <a:pPr>
-              <a:defRPr sz="3200" b="1">
+              <a:defRPr sz="2800" b="1">
                 <a:solidFill>
                   <a:srgbClr val="0D1B2A"/>
                 </a:solidFill>
@@ -6361,7 +6670,7 @@
               <a:spcAft>
                 <a:spcPts val="1000"/>
               </a:spcAft>
-              <a:defRPr sz="1800">
+              <a:defRPr sz="1500">
                 <a:solidFill>
                   <a:srgbClr val="222222"/>
                 </a:solidFill>
@@ -6376,7 +6685,7 @@
               <a:spcAft>
                 <a:spcPts val="1000"/>
               </a:spcAft>
-              <a:defRPr sz="1800">
+              <a:defRPr sz="1500">
                 <a:solidFill>
                   <a:srgbClr val="222222"/>
                 </a:solidFill>
@@ -6391,7 +6700,7 @@
               <a:spcAft>
                 <a:spcPts val="1000"/>
               </a:spcAft>
-              <a:defRPr sz="1800">
+              <a:defRPr sz="1500">
                 <a:solidFill>
                   <a:srgbClr val="222222"/>
                 </a:solidFill>
@@ -6399,6 +6708,21 @@
             </a:pPr>
             <a:r>
               <a:t>•  What IS comparable: throughput, marginal cost, capacity elasticity. What is NOT: workload complexity, quality/correctness, supervision burden, context completeness — kept visibly separate, not folded into one multiplier</a:t>
+            </a:r>
+          </a:p>
+          <a:p>
+            <a:pPr>
+              <a:spcAft>
+                <a:spcPts val="1000"/>
+              </a:spcAft>
+              <a:defRPr sz="1500">
+                <a:solidFill>
+                  <a:srgbClr val="222222"/>
+                </a:solidFill>
+              </a:defRPr>
+            </a:pPr>
+            <a:r>
+              <a:t>•  Employer/billable split: owned AI pairs with human employer cost (fully loaded); retail AI pairs with human billable/externally-purchased rate (which embeds its own margin+overhead). Mixing the pairs mixes internal vs. external cost layers.</a:t>
             </a:r>
           </a:p>
         </p:txBody>
